--- a/Topic_D/Exam_Practice/TD-L07_Writing_Workshop_The_Workplace_and_Working_Conditions.pptx
+++ b/Topic_D/Exam_Practice/TD-L07_Writing_Workshop_The_Workplace_and_Working_Conditions.pptx
@@ -784,7 +784,11 @@
           <a:lstStyle/>
           <a:p>
             <a:r>
-              <a:rPr lang="en-US" dirty="0"/>
+              <a:rPr lang="ar-SA" dirty="0">
+                <a:latin typeface="Amiri" pitchFamily="2" charset="-78"/>
+                <a:ea typeface="Amiri" pitchFamily="2" charset="-78"/>
+                <a:cs typeface="Amiri" pitchFamily="2" charset="-78"/>
+              </a:rPr>
               <a:t>Q3 (3 min to choose and read). Title (أ) suits Core and Develop; title (ب) suits Stretch.</a:t>
             </a:r>
             <a:endParaRPr lang="en-US" dirty="0"/>
@@ -1403,7 +1407,11 @@
           <a:lstStyle/>
           <a:p>
             <a:r>
-              <a:rPr lang="en-US" dirty="0"/>
+              <a:rPr lang="ar-SA" dirty="0">
+                <a:latin typeface="Amiri" pitchFamily="2" charset="-78"/>
+                <a:ea typeface="Amiri" pitchFamily="2" charset="-78"/>
+                <a:cs typeface="Amiri" pitchFamily="2" charset="-78"/>
+              </a:rPr>
               <a:t>WELCOME (1 min) — while students join.
 • Greet each student by name as they arrive: السَّلَامُ عَلَيْكُمْ. Take the register (Pastoral Tracker: attendance 0/1).
 • 2-MINUTE CHECK-IN (SEND training): a private chat to any student who seemed unsettled last lesson — “Are you okay today? 👍 / 👎”.
@@ -1936,7 +1944,11 @@
           <a:lstStyle/>
           <a:p>
             <a:r>
-              <a:rPr lang="en-US" dirty="0"/>
+              <a:rPr lang="ar-SA" dirty="0">
+                <a:latin typeface="Amiri" pitchFamily="2" charset="-78"/>
+                <a:ea typeface="Amiri" pitchFamily="2" charset="-78"/>
+                <a:cs typeface="Amiri" pitchFamily="2" charset="-78"/>
+              </a:rPr>
               <a:t>Question words: أَيْنَ (where) · مَا سَاعَاتُكَ (your hours) · كَيْفَ كَانَ (what was it like — PAST) · سَتَفْعَلُ (will do — FUTURE).</a:t>
             </a:r>
             <a:endParaRPr lang="en-US" dirty="0"/>
@@ -2508,6 +2520,7 @@
                   <a:srgbClr val="D4AF37"/>
                 </a:solidFill>
                 <a:latin typeface="Amiri" pitchFamily="2" charset="-78"/>
+                <a:ea typeface="Amiri" pitchFamily="2" charset="-78"/>
                 <a:cs typeface="Amiri" pitchFamily="2" charset="-78"/>
               </a:rPr>
               <a:t>م</a:t>
@@ -2714,6 +2727,7 @@
                   <a:srgbClr val="D4AF37"/>
                 </a:solidFill>
                 <a:latin typeface="Amiri" pitchFamily="2" charset="-78"/>
+                <a:ea typeface="Amiri" pitchFamily="2" charset="-78"/>
                 <a:cs typeface="Amiri" pitchFamily="2" charset="-78"/>
               </a:rPr>
               <a:t>وَرْشَةُ الكِتَابَةِ — مَكَانُ العَمَلِ وَظُرُوفُهُ</a:t>
@@ -3171,6 +3185,7 @@
                   <a:srgbClr val="D4AF37"/>
                 </a:solidFill>
                 <a:latin typeface="Amiri" pitchFamily="2" charset="-78"/>
+                <a:ea typeface="Amiri" pitchFamily="2" charset="-78"/>
                 <a:cs typeface="Amiri" pitchFamily="2" charset="-78"/>
               </a:rPr>
               <a:t>م</a:t>
@@ -3491,6 +3506,7 @@
                   <a:srgbClr val="8A6D1E"/>
                 </a:solidFill>
                 <a:latin typeface="Amiri" pitchFamily="2" charset="-78"/>
+                <a:ea typeface="Amiri" pitchFamily="2" charset="-78"/>
                 <a:cs typeface="Amiri" pitchFamily="2" charset="-78"/>
               </a:rPr>
               <a:t>نَمُوذَجُ الإِجَابَةِ</a:t>
@@ -3604,6 +3620,7 @@
                   <a:srgbClr val="1F2A37"/>
                 </a:solidFill>
                 <a:latin typeface="Amiri" pitchFamily="2" charset="-78"/>
+                <a:ea typeface="Amiri" pitchFamily="2" charset="-78"/>
                 <a:cs typeface="Amiri" pitchFamily="2" charset="-78"/>
               </a:rPr>
               <a:t>مَرْحَبًا يَا عَلِيُّ،</a:t>
@@ -3623,6 +3640,7 @@
                   <a:srgbClr val="1F2A37"/>
                 </a:solidFill>
                 <a:latin typeface="Amiri" pitchFamily="2" charset="-78"/>
+                <a:ea typeface="Amiri" pitchFamily="2" charset="-78"/>
                 <a:cs typeface="Amiri" pitchFamily="2" charset="-78"/>
               </a:rPr>
               <a:t>كَيْفَ حَالُكَ؟ عِنْدِي أَخْبَارٌ جَدِيدَةٌ: وَجَدْتُ عَمَلًا جُزْئِيًّا فِي مَكْتَبَةٍ قُرْبَ بَيْتِي. أَعْمَلُ يَوْمَ السَّبْتِ مِنَ التَّاسِعَةِ إِلَى الثَّالِثَةِ، وَالأَجْرُ عَشَرَةُ جُنَيْهَاتٍ فِي السَّاعَةِ. أُرَتِّبُ الكُتُبَ، وَأُسَاعِدُ الزَّبَائِنَ. فِي الصَّيْفِ المَاضِي كُنْتُ أَعْمَلُ فِي مَطْعَمٍ، وَكَانَ العَمَلُ مُتْعِبًا جِدًّا. فِي رَأْيِي، المَكْتَبَةُ أَفْضَلُ مِنَ المَطْعَمِ، لِأَنَّهَا أَهْدَأُ، وَالمُدِيرَةَ لَطِيفَةٌ. بِالمَالِ سَأَشْتَرِي حَاسُوبًا جَدِيدًا، وَسَأَدَّخِرُ البَاقِيَ لِلْجَامِعَةِ.</a:t>
@@ -3642,6 +3660,7 @@
                   <a:srgbClr val="1F2A37"/>
                 </a:solidFill>
                 <a:latin typeface="Amiri" pitchFamily="2" charset="-78"/>
+                <a:ea typeface="Amiri" pitchFamily="2" charset="-78"/>
                 <a:cs typeface="Amiri" pitchFamily="2" charset="-78"/>
               </a:rPr>
               <a:t>إِلَى اللِّقَاءِ،</a:t>
@@ -3661,6 +3680,7 @@
                   <a:srgbClr val="1F2A37"/>
                 </a:solidFill>
                 <a:latin typeface="Amiri" pitchFamily="2" charset="-78"/>
+                <a:ea typeface="Amiri" pitchFamily="2" charset="-78"/>
                 <a:cs typeface="Amiri" pitchFamily="2" charset="-78"/>
               </a:rPr>
               <a:t>مَازِنٌ</a:t>
@@ -3824,11 +3844,12 @@
               <a:buNone/>
             </a:pPr>
             <a:r>
-              <a:rPr lang="en-US" sz="950" b="1" dirty="0">
+              <a:rPr lang="ar-SA" sz="950" b="1" dirty="0">
                 <a:solidFill>
                   <a:srgbClr val="FFFFFF"/>
                 </a:solidFill>
                 <a:latin typeface="Calibri" pitchFamily="34" charset="0"/>
+                <a:ea typeface="Amiri" pitchFamily="2" charset="-78"/>
                 <a:cs typeface="Amiri" pitchFamily="2" charset="-78"/>
               </a:rPr>
               <a:t>مِنَ التَّاسِعَةِ إِلَى الثَّالِثَةِ</a:t>
@@ -3889,11 +3910,12 @@
               <a:buNone/>
             </a:pPr>
             <a:r>
-              <a:rPr lang="en-US" sz="950" b="1" dirty="0">
+              <a:rPr lang="ar-SA" sz="950" b="1" dirty="0">
                 <a:solidFill>
                   <a:srgbClr val="FFFFFF"/>
                 </a:solidFill>
                 <a:latin typeface="Calibri" pitchFamily="34" charset="0"/>
+                <a:ea typeface="Amiri" pitchFamily="2" charset="-78"/>
                 <a:cs typeface="Amiri" pitchFamily="2" charset="-78"/>
               </a:rPr>
               <a:t>عَشَرَةُ جُنَيْهَاتٍ</a:t>
@@ -3954,11 +3976,12 @@
               <a:buNone/>
             </a:pPr>
             <a:r>
-              <a:rPr lang="en-US" sz="950" b="1" dirty="0">
+              <a:rPr lang="ar-SA" sz="950" b="1" dirty="0">
                 <a:solidFill>
                   <a:srgbClr val="FFFFFF"/>
                 </a:solidFill>
                 <a:latin typeface="Calibri" pitchFamily="34" charset="0"/>
+                <a:ea typeface="Amiri" pitchFamily="2" charset="-78"/>
                 <a:cs typeface="Amiri" pitchFamily="2" charset="-78"/>
               </a:rPr>
               <a:t>كُنْتُ أَعْمَلُ</a:t>
@@ -4019,11 +4042,12 @@
               <a:buNone/>
             </a:pPr>
             <a:r>
-              <a:rPr lang="en-US" sz="950" b="1" dirty="0">
+              <a:rPr lang="ar-SA" sz="950" b="1" dirty="0">
                 <a:solidFill>
                   <a:srgbClr val="FFFFFF"/>
                 </a:solidFill>
                 <a:latin typeface="Calibri" pitchFamily="34" charset="0"/>
+                <a:ea typeface="Amiri" pitchFamily="2" charset="-78"/>
                 <a:cs typeface="Amiri" pitchFamily="2" charset="-78"/>
               </a:rPr>
               <a:t>أَفْضَلُ مِنَ المَطْعَمِ</a:t>
@@ -4157,6 +4181,7 @@
                   <a:srgbClr val="D4AF37"/>
                 </a:solidFill>
                 <a:latin typeface="Amiri" pitchFamily="2" charset="-78"/>
+                <a:ea typeface="Amiri" pitchFamily="2" charset="-78"/>
                 <a:cs typeface="Amiri" pitchFamily="2" charset="-78"/>
               </a:rPr>
               <a:t>م</a:t>
@@ -4477,6 +4502,7 @@
                   <a:srgbClr val="8A6D1E"/>
                 </a:solidFill>
                 <a:latin typeface="Amiri" pitchFamily="2" charset="-78"/>
+                <a:ea typeface="Amiri" pitchFamily="2" charset="-78"/>
                 <a:cs typeface="Amiri" pitchFamily="2" charset="-78"/>
               </a:rPr>
               <a:t>نَمُوذَجُ الإِجَابَةِ</a:t>
@@ -4590,6 +4616,7 @@
                   <a:srgbClr val="1F2A37"/>
                 </a:solidFill>
                 <a:latin typeface="Amiri" pitchFamily="2" charset="-78"/>
+                <a:ea typeface="Amiri" pitchFamily="2" charset="-78"/>
                 <a:cs typeface="Amiri" pitchFamily="2" charset="-78"/>
               </a:rPr>
               <a:t>عَزِيزِي عَلِيُّ،</a:t>
@@ -4609,6 +4636,7 @@
                   <a:srgbClr val="1F2A37"/>
                 </a:solidFill>
                 <a:latin typeface="Amiri" pitchFamily="2" charset="-78"/>
+                <a:ea typeface="Amiri" pitchFamily="2" charset="-78"/>
                 <a:cs typeface="Amiri" pitchFamily="2" charset="-78"/>
               </a:rPr>
               <a:t>بَدَأْتُ هٰذَا الشَّهْرَ عَمَلًا جُزْئِيًّا فِي مَكْتَبَةٍ صَغِيرَةٍ لَا تَبْعُدُ عَنْ بَيْتِي إِلَّا خَمْسَ دَقَائِقَ؛ أَعْمَلُ فِيهَا كُلَّ سَبْتٍ مِنَ التَّاسِعَةِ إِلَى الثَّالِثَةِ، مُقَابِلَ عَشَرَةِ جُنَيْهَاتٍ فِي السَّاعَةِ. وَتَشْمَلُ مَهَامِّي تَرْتِيبَ الرُّفُوفِ، وَاقْتِرَاحَ الكُتُبِ عَلَى الزَّبَائِنِ، وَهُوَ الجُزْءُ الَّذِي أُحِبُّهُ أَكْثَرَ. وَعَلَى عَكْسِ المَطْعَمِ الَّذِي كُنْتُ أَعْمَلُ فِيهِ الصَّيْفَ المَاضِي، حَيْثُ كَانَتِ النَّوْبَاتُ طَوِيلَةً وَالضَّجِيجُ لَا يَتَوَقَّفُ، أَجِدُ هُنَا هُدُوءًا وَمُدِيرَةً تُقَدِّرُ جُهُودَ المُوَظَّفِينَ. صَحِيحٌ أَنَّ الأَجْرَ أَقَلُّ قَلِيلًا، غَيْرَ أَنَّ الظُّرُوفَ أَفْضَلُ بِكَثِيرٍ. وَسَأَدَّخِرُ مُعْظَمَ مَا أَكْسِبُهُ لِلْجَامِعَةِ.</a:t>
@@ -4628,6 +4656,7 @@
                   <a:srgbClr val="1F2A37"/>
                 </a:solidFill>
                 <a:latin typeface="Amiri" pitchFamily="2" charset="-78"/>
+                <a:ea typeface="Amiri" pitchFamily="2" charset="-78"/>
                 <a:cs typeface="Amiri" pitchFamily="2" charset="-78"/>
               </a:rPr>
               <a:t>مَعَ تَحِيَّاتِي،</a:t>
@@ -4647,6 +4676,7 @@
                   <a:srgbClr val="1F2A37"/>
                 </a:solidFill>
                 <a:latin typeface="Amiri" pitchFamily="2" charset="-78"/>
+                <a:ea typeface="Amiri" pitchFamily="2" charset="-78"/>
                 <a:cs typeface="Amiri" pitchFamily="2" charset="-78"/>
               </a:rPr>
               <a:t>مَازِنٌ</a:t>
@@ -4810,11 +4840,12 @@
               <a:buNone/>
             </a:pPr>
             <a:r>
-              <a:rPr lang="en-US" sz="950" b="1" dirty="0">
+              <a:rPr lang="ar-SA" sz="950" b="1" dirty="0">
                 <a:solidFill>
                   <a:srgbClr val="FFFFFF"/>
                 </a:solidFill>
                 <a:latin typeface="Calibri" pitchFamily="34" charset="0"/>
+                <a:ea typeface="Amiri" pitchFamily="2" charset="-78"/>
                 <a:cs typeface="Amiri" pitchFamily="2" charset="-78"/>
               </a:rPr>
               <a:t>لَا تَبْعُدُ … إِلَّا</a:t>
@@ -4875,11 +4906,12 @@
               <a:buNone/>
             </a:pPr>
             <a:r>
-              <a:rPr lang="en-US" sz="950" b="1" dirty="0">
+              <a:rPr lang="ar-SA" sz="950" b="1" dirty="0">
                 <a:solidFill>
                   <a:srgbClr val="FFFFFF"/>
                 </a:solidFill>
                 <a:latin typeface="Calibri" pitchFamily="34" charset="0"/>
+                <a:ea typeface="Amiri" pitchFamily="2" charset="-78"/>
                 <a:cs typeface="Amiri" pitchFamily="2" charset="-78"/>
               </a:rPr>
               <a:t>وَهُوَ الجُزْءُ الَّذِي</a:t>
@@ -4940,11 +4972,12 @@
               <a:buNone/>
             </a:pPr>
             <a:r>
-              <a:rPr lang="en-US" sz="950" b="1" dirty="0">
+              <a:rPr lang="ar-SA" sz="950" b="1" dirty="0">
                 <a:solidFill>
                   <a:srgbClr val="FFFFFF"/>
                 </a:solidFill>
                 <a:latin typeface="Calibri" pitchFamily="34" charset="0"/>
+                <a:ea typeface="Amiri" pitchFamily="2" charset="-78"/>
                 <a:cs typeface="Amiri" pitchFamily="2" charset="-78"/>
               </a:rPr>
               <a:t>عَلَى عَكْسِ المَطْعَمِ الَّذِي</a:t>
@@ -5005,11 +5038,12 @@
               <a:buNone/>
             </a:pPr>
             <a:r>
-              <a:rPr lang="en-US" sz="950" b="1" dirty="0">
+              <a:rPr lang="ar-SA" sz="950" b="1" dirty="0">
                 <a:solidFill>
                   <a:srgbClr val="FFFFFF"/>
                 </a:solidFill>
                 <a:latin typeface="Calibri" pitchFamily="34" charset="0"/>
+                <a:ea typeface="Amiri" pitchFamily="2" charset="-78"/>
                 <a:cs typeface="Amiri" pitchFamily="2" charset="-78"/>
               </a:rPr>
               <a:t>صَحِيحٌ أَنَّ … غَيْرَ أَنَّ</a:t>
@@ -5143,6 +5177,7 @@
                   <a:srgbClr val="D4AF37"/>
                 </a:solidFill>
                 <a:latin typeface="Amiri" pitchFamily="2" charset="-78"/>
+                <a:ea typeface="Amiri" pitchFamily="2" charset="-78"/>
                 <a:cs typeface="Amiri" pitchFamily="2" charset="-78"/>
               </a:rPr>
               <a:t>م</a:t>
@@ -5463,6 +5498,7 @@
                   <a:srgbClr val="8A6D1E"/>
                 </a:solidFill>
                 <a:latin typeface="Amiri" pitchFamily="2" charset="-78"/>
+                <a:ea typeface="Amiri" pitchFamily="2" charset="-78"/>
                 <a:cs typeface="Amiri" pitchFamily="2" charset="-78"/>
               </a:rPr>
               <a:t>اخْتَرْ عُنْوَانًا وَاحِدًا</a:t>
@@ -5743,6 +5779,7 @@
                   <a:srgbClr val="1B3B6F"/>
                 </a:solidFill>
                 <a:latin typeface="Amiri" pitchFamily="2" charset="-78"/>
+                <a:ea typeface="Amiri" pitchFamily="2" charset="-78"/>
                 <a:cs typeface="Amiri" pitchFamily="2" charset="-78"/>
               </a:rPr>
               <a:t>مَكَانُ عَمَلٍ أَعْرِفُهُ</a:t>
@@ -5781,6 +5818,7 @@
                   <a:srgbClr val="1B3B6F"/>
                 </a:solidFill>
                 <a:latin typeface="Amiri" pitchFamily="2" charset="-78"/>
+                <a:ea typeface="Amiri" pitchFamily="2" charset="-78"/>
                 <a:cs typeface="Amiri" pitchFamily="2" charset="-78"/>
               </a:rPr>
               <a:t>(أ)</a:t>
@@ -5887,6 +5925,7 @@
                   <a:srgbClr val="1B3B6F"/>
                 </a:solidFill>
                 <a:latin typeface="Amiri" pitchFamily="2" charset="-78"/>
+                <a:ea typeface="Amiri" pitchFamily="2" charset="-78"/>
                 <a:cs typeface="Amiri" pitchFamily="2" charset="-78"/>
               </a:rPr>
               <a:t>المَكَانُ وَسَاعَاتُ العَمَلِ · الزُّمَلَاءُ وَالظُّرُوفُ · مُقَارَنَةٌ بِعَمَلٍ سَابِقٍ · رَأْيُكَ وَخِطَطُكَ</a:t>
@@ -6018,6 +6057,7 @@
                   <a:srgbClr val="1B3B6F"/>
                 </a:solidFill>
                 <a:latin typeface="Amiri" pitchFamily="2" charset="-78"/>
+                <a:ea typeface="Amiri" pitchFamily="2" charset="-78"/>
                 <a:cs typeface="Amiri" pitchFamily="2" charset="-78"/>
               </a:rPr>
               <a:t>ظُرُوفُ العَمَلِ تَتَغَيَّرُ</a:t>
@@ -6056,6 +6096,7 @@
                   <a:srgbClr val="1B3B6F"/>
                 </a:solidFill>
                 <a:latin typeface="Amiri" pitchFamily="2" charset="-78"/>
+                <a:ea typeface="Amiri" pitchFamily="2" charset="-78"/>
                 <a:cs typeface="Amiri" pitchFamily="2" charset="-78"/>
               </a:rPr>
               <a:t>(ب)</a:t>
@@ -6159,6 +6200,7 @@
                   <a:srgbClr val="1B3B6F"/>
                 </a:solidFill>
                 <a:latin typeface="Amiri" pitchFamily="2" charset="-78"/>
+                <a:ea typeface="Amiri" pitchFamily="2" charset="-78"/>
                 <a:cs typeface="Amiri" pitchFamily="2" charset="-78"/>
               </a:rPr>
               <a:t>العَمَلُ فِي المَاضِي وَاليَوْمَ · الإِيجَابِيَّاتُ وَالسَّلْبِيَّاتُ · مِثَالٌ مِنْ حَيَاتِكَ · رَأْيُكَ</a:t>
@@ -6358,6 +6400,7 @@
                   <a:srgbClr val="D4AF37"/>
                 </a:solidFill>
                 <a:latin typeface="Amiri" pitchFamily="2" charset="-78"/>
+                <a:ea typeface="Amiri" pitchFamily="2" charset="-78"/>
                 <a:cs typeface="Amiri" pitchFamily="2" charset="-78"/>
               </a:rPr>
               <a:t>م</a:t>
@@ -6678,6 +6721,7 @@
                   <a:srgbClr val="8A6D1E"/>
                 </a:solidFill>
                 <a:latin typeface="Amiri" pitchFamily="2" charset="-78"/>
+                <a:ea typeface="Amiri" pitchFamily="2" charset="-78"/>
                 <a:cs typeface="Amiri" pitchFamily="2" charset="-78"/>
               </a:rPr>
               <a:t>خُطَّةُ الكِتَابَةِ</a:t>
@@ -7302,6 +7346,7 @@
                   <a:srgbClr val="1B3B6F"/>
                 </a:solidFill>
                 <a:latin typeface="Amiri" pitchFamily="2" charset="-78"/>
+                <a:ea typeface="Amiri" pitchFamily="2" charset="-78"/>
                 <a:cs typeface="Amiri" pitchFamily="2" charset="-78"/>
               </a:rPr>
               <a:t>أَبْدَأُ فِي السَّاعَةِ السَّابِعَةِ، وَأَنْتَهِي فِي الثَّانِيَةِ.</a:t>
@@ -7401,6 +7446,7 @@
                   <a:srgbClr val="1B3B6F"/>
                 </a:solidFill>
                 <a:latin typeface="Amiri" pitchFamily="2" charset="-78"/>
+                <a:ea typeface="Amiri" pitchFamily="2" charset="-78"/>
                 <a:cs typeface="Amiri" pitchFamily="2" charset="-78"/>
               </a:rPr>
               <a:t>كَانَتِ السَّاعَاتُ أَطْوَلَ، وَكَانَ المُدِيرُ صَارِمًا.</a:t>
@@ -7500,6 +7546,7 @@
                   <a:srgbClr val="1B3B6F"/>
                 </a:solidFill>
                 <a:latin typeface="Amiri" pitchFamily="2" charset="-78"/>
+                <a:ea typeface="Amiri" pitchFamily="2" charset="-78"/>
                 <a:cs typeface="Amiri" pitchFamily="2" charset="-78"/>
               </a:rPr>
               <a:t>سَأَدَّخِرُ مَالِي لِأُسَافِرَ حَوْلَ العَالَمِ.</a:t>
@@ -7661,6 +7708,7 @@
                   <a:srgbClr val="1F2A37"/>
                 </a:solidFill>
                 <a:latin typeface="Amiri" pitchFamily="2" charset="-78"/>
+                <a:ea typeface="Amiri" pitchFamily="2" charset="-78"/>
                 <a:cs typeface="Amiri" pitchFamily="2" charset="-78"/>
               </a:rPr>
               <a:t>أ</a:t>
@@ -7687,6 +7735,7 @@
                   <a:srgbClr val="1F2A37"/>
                 </a:solidFill>
                 <a:latin typeface="Amiri" pitchFamily="2" charset="-78"/>
+                <a:ea typeface="Amiri" pitchFamily="2" charset="-78"/>
                 <a:cs typeface="Amiri" pitchFamily="2" charset="-78"/>
               </a:rPr>
               <a:t>ب</a:t>
@@ -7833,6 +7882,7 @@
                   <a:srgbClr val="D4AF37"/>
                 </a:solidFill>
                 <a:latin typeface="Amiri" pitchFamily="2" charset="-78"/>
+                <a:ea typeface="Amiri" pitchFamily="2" charset="-78"/>
                 <a:cs typeface="Amiri" pitchFamily="2" charset="-78"/>
               </a:rPr>
               <a:t>م</a:t>
@@ -8090,6 +8140,7 @@
                   <a:srgbClr val="8A6D1E"/>
                 </a:solidFill>
                 <a:latin typeface="Amiri" pitchFamily="2" charset="-78"/>
+                <a:ea typeface="Amiri" pitchFamily="2" charset="-78"/>
                 <a:cs typeface="Amiri" pitchFamily="2" charset="-78"/>
               </a:rPr>
               <a:t>أ</a:t>
@@ -8154,6 +8205,7 @@
                   <a:srgbClr val="1B3B6F"/>
                 </a:solidFill>
                 <a:latin typeface="Amiri" pitchFamily="2" charset="-78"/>
+                <a:ea typeface="Amiri" pitchFamily="2" charset="-78"/>
                 <a:cs typeface="Amiri" pitchFamily="2" charset="-78"/>
               </a:rPr>
               <a:t>أ</a:t>
@@ -8205,6 +8257,7 @@
                   <a:srgbClr val="8A6D1E"/>
                 </a:solidFill>
                 <a:latin typeface="Amiri" pitchFamily="2" charset="-78"/>
+                <a:ea typeface="Amiri" pitchFamily="2" charset="-78"/>
                 <a:cs typeface="Amiri" pitchFamily="2" charset="-78"/>
               </a:rPr>
               <a:t>نَمُوذَجُ الإِجَابَةِ</a:t>
@@ -8318,6 +8371,7 @@
                   <a:srgbClr val="1F2A37"/>
                 </a:solidFill>
                 <a:latin typeface="Amiri" pitchFamily="2" charset="-78"/>
+                <a:ea typeface="Amiri" pitchFamily="2" charset="-78"/>
                 <a:cs typeface="Amiri" pitchFamily="2" charset="-78"/>
               </a:rPr>
               <a:t>أَعْمَلُ فِي مَخْبَزٍ صَغِيرٍ فِي حَيِّنَا كُلَّ يَوْمِ سَبْتٍ. أَبْدَأُ فِي السَّاعَةِ السَّابِعَةِ صَبَاحًا، وَأَنْتَهِي فِي الثَّانِيَةِ ظُهْرًا. الأَجْرُ تِسْعَةُ جُنَيْهَاتٍ فِي السَّاعَةِ. أَبِيعُ الخُبْزَ وَالحَلَوِيَّاتِ، وَأُنَظِّفُ المَكَانَ فِي النِّهَايَةِ. أَحْيَانًا أُسَاعِدُ الخَبَّازَ فِي صُنْعِ الكَعْكِ.</a:t>
@@ -8337,6 +8391,7 @@
                   <a:srgbClr val="1F2A37"/>
                 </a:solidFill>
                 <a:latin typeface="Amiri" pitchFamily="2" charset="-78"/>
+                <a:ea typeface="Amiri" pitchFamily="2" charset="-78"/>
                 <a:cs typeface="Amiri" pitchFamily="2" charset="-78"/>
               </a:rPr>
               <a:t>مَكَانُ العَمَلِ صَغِيرٌ وَدَافِئٌ، وَرَائِحَتُهُ جَمِيلَةٌ جِدًّا. زُمَلَائِي لُطَفَاءُ، وَالمُدِيرُ يُسَاعِدُنِي دَائِمًا. لٰكِنَّ العَمَلَ مُتْعِبٌ قَلِيلًا، لِأَنِّي أَقِفُ طُولَ الوَقْتِ، وَالمَخْبَزُ مُزْدَحِمٌ فِي الصَّبَاحِ.</a:t>
@@ -8356,6 +8411,7 @@
                   <a:srgbClr val="1F2A37"/>
                 </a:solidFill>
                 <a:latin typeface="Amiri" pitchFamily="2" charset="-78"/>
+                <a:ea typeface="Amiri" pitchFamily="2" charset="-78"/>
                 <a:cs typeface="Amiri" pitchFamily="2" charset="-78"/>
               </a:rPr>
               <a:t>فِي الصَّيْفِ المَاضِي كُنْتُ أَعْمَلُ فِي مَطْعَمٍ كَبِيرٍ. كَانَتِ السَّاعَاتُ أَطْوَلَ، وَكَانَ المُدِيرُ صَارِمًا جِدًّا. كَانَ الأَجْرُ أَعْلَى، لٰكِنِّي لَمْ أَكُنْ سَعِيدًا هُنَاكَ، فَتَرَكْتُ العَمَلَ بَعْدَ شَهْرٍ.</a:t>
@@ -8375,6 +8431,7 @@
                   <a:srgbClr val="1F2A37"/>
                 </a:solidFill>
                 <a:latin typeface="Amiri" pitchFamily="2" charset="-78"/>
+                <a:ea typeface="Amiri" pitchFamily="2" charset="-78"/>
                 <a:cs typeface="Amiri" pitchFamily="2" charset="-78"/>
               </a:rPr>
               <a:t>فِي رَأْيِي، ظُرُوفُ العَمَلِ أَهَمُّ مِنَ الرَّاتِبِ. فِي المُسْتَقْبَلِ أُرِيدُ أَنْ أَعْمَلَ فِي مَكَانٍ هَادِئٍ وَمُرِيحٍ، مَعَ زُمَلَاءَ لُطَفَاءَ، وَسَأَدَّخِرُ مَالِي لِأُسَافِرَ حَوْلَ العَالَمِ.</a:t>
@@ -8538,11 +8595,12 @@
               <a:buNone/>
             </a:pPr>
             <a:r>
-              <a:rPr lang="en-US" sz="950" b="1" dirty="0">
+              <a:rPr lang="ar-SA" sz="950" b="1" dirty="0">
                 <a:solidFill>
                   <a:srgbClr val="FFFFFF"/>
                 </a:solidFill>
                 <a:latin typeface="Calibri" pitchFamily="34" charset="0"/>
+                <a:ea typeface="Amiri" pitchFamily="2" charset="-78"/>
                 <a:cs typeface="Amiri" pitchFamily="2" charset="-78"/>
               </a:rPr>
               <a:t>فِي السَّاعَةِ السَّابِعَةِ</a:t>
@@ -8603,11 +8661,12 @@
               <a:buNone/>
             </a:pPr>
             <a:r>
-              <a:rPr lang="en-US" sz="950" b="1" dirty="0">
+              <a:rPr lang="ar-SA" sz="950" b="1" dirty="0">
                 <a:solidFill>
                   <a:srgbClr val="FFFFFF"/>
                 </a:solidFill>
                 <a:latin typeface="Calibri" pitchFamily="34" charset="0"/>
+                <a:ea typeface="Amiri" pitchFamily="2" charset="-78"/>
                 <a:cs typeface="Amiri" pitchFamily="2" charset="-78"/>
               </a:rPr>
               <a:t>زُمَلَائِي لُطَفَاءُ</a:t>
@@ -8668,11 +8727,12 @@
               <a:buNone/>
             </a:pPr>
             <a:r>
-              <a:rPr lang="en-US" sz="950" b="1" dirty="0">
+              <a:rPr lang="ar-SA" sz="950" b="1" dirty="0">
                 <a:solidFill>
                   <a:srgbClr val="FFFFFF"/>
                 </a:solidFill>
                 <a:latin typeface="Calibri" pitchFamily="34" charset="0"/>
+                <a:ea typeface="Amiri" pitchFamily="2" charset="-78"/>
                 <a:cs typeface="Amiri" pitchFamily="2" charset="-78"/>
               </a:rPr>
               <a:t>كَانَتِ السَّاعَاتُ أَطْوَلَ</a:t>
@@ -8733,11 +8793,12 @@
               <a:buNone/>
             </a:pPr>
             <a:r>
-              <a:rPr lang="en-US" sz="950" b="1" dirty="0">
+              <a:rPr lang="ar-SA" sz="950" b="1" dirty="0">
                 <a:solidFill>
                   <a:srgbClr val="FFFFFF"/>
                 </a:solidFill>
                 <a:latin typeface="Calibri" pitchFamily="34" charset="0"/>
+                <a:ea typeface="Amiri" pitchFamily="2" charset="-78"/>
                 <a:cs typeface="Amiri" pitchFamily="2" charset="-78"/>
               </a:rPr>
               <a:t>أَهَمُّ مِنَ الرَّاتِبِ</a:t>
@@ -8871,6 +8932,7 @@
                   <a:srgbClr val="D4AF37"/>
                 </a:solidFill>
                 <a:latin typeface="Amiri" pitchFamily="2" charset="-78"/>
+                <a:ea typeface="Amiri" pitchFamily="2" charset="-78"/>
                 <a:cs typeface="Amiri" pitchFamily="2" charset="-78"/>
               </a:rPr>
               <a:t>م</a:t>
@@ -9128,6 +9190,7 @@
                   <a:srgbClr val="8A6D1E"/>
                 </a:solidFill>
                 <a:latin typeface="Amiri" pitchFamily="2" charset="-78"/>
+                <a:ea typeface="Amiri" pitchFamily="2" charset="-78"/>
                 <a:cs typeface="Amiri" pitchFamily="2" charset="-78"/>
               </a:rPr>
               <a:t>أ</a:t>
@@ -9192,6 +9255,7 @@
                   <a:srgbClr val="1B3B6F"/>
                 </a:solidFill>
                 <a:latin typeface="Amiri" pitchFamily="2" charset="-78"/>
+                <a:ea typeface="Amiri" pitchFamily="2" charset="-78"/>
                 <a:cs typeface="Amiri" pitchFamily="2" charset="-78"/>
               </a:rPr>
               <a:t>أ</a:t>
@@ -9243,6 +9307,7 @@
                   <a:srgbClr val="8A6D1E"/>
                 </a:solidFill>
                 <a:latin typeface="Amiri" pitchFamily="2" charset="-78"/>
+                <a:ea typeface="Amiri" pitchFamily="2" charset="-78"/>
                 <a:cs typeface="Amiri" pitchFamily="2" charset="-78"/>
               </a:rPr>
               <a:t>نَمُوذَجُ الإِجَابَةِ</a:t>
@@ -9356,6 +9421,7 @@
                   <a:srgbClr val="1F2A37"/>
                 </a:solidFill>
                 <a:latin typeface="Amiri" pitchFamily="2" charset="-78"/>
+                <a:ea typeface="Amiri" pitchFamily="2" charset="-78"/>
                 <a:cs typeface="Amiri" pitchFamily="2" charset="-78"/>
               </a:rPr>
               <a:t>لَمْ أَكُنْ أَتَخَيَّلُ أَنَّ عَمَلًا بَسِيطًا فِي مَخْبَزِ الحَيِّ سَيُعَلِّمُنِي مَا لَمْ تُعَلِّمْنِي إِيَّاهُ سَنَوَاتٌ مِنَ الدِّرَاسَةِ. فَمُنْذُ سَنَةٍ أَعْمَلُ هُنَاكَ كُلَّ سَبْتٍ، مِنَ السَّابِعَةِ صَبَاحًا حَتَّى الثَّانِيَةِ ظُهْرًا، مُقَابِلَ أَجْرٍ مُتَوَاضِعٍ وَخُبْزٍ طَازَجٍ.</a:t>
@@ -9375,6 +9441,7 @@
                   <a:srgbClr val="1F2A37"/>
                 </a:solidFill>
                 <a:latin typeface="Amiri" pitchFamily="2" charset="-78"/>
+                <a:ea typeface="Amiri" pitchFamily="2" charset="-78"/>
                 <a:cs typeface="Amiri" pitchFamily="2" charset="-78"/>
               </a:rPr>
               <a:t>وَمَعَ أَنَّ العَمَلَ يَتَطَلَّبُ الوُقُوفَ سَاعَاتٍ طَوِيلَةً، فَإِنَّ الجَوَّ هُنَاكَ يُنْسِينِي التَّعَبَ؛ فَصَاحِبُ المَخْبَزِ يُعَامِلُنَا كَأَفْرَادِ أُسْرَتِهِ، وَيُشَجِّعُنَا عَلَى تَجْرِبَةِ وَصَفَاتٍ جَدِيدَةٍ، بَلْ إِنَّ إِحْدَى وَصَفَاتِي أَصْبَحَتْ تُبَاعُ كُلَّ أُسْبُوعٍ، وَيَسْأَلُ عَنْهَا الزَّبَائِنُ بِالاسْمِ.</a:t>
@@ -9394,6 +9461,7 @@
                   <a:srgbClr val="1F2A37"/>
                 </a:solidFill>
                 <a:latin typeface="Amiri" pitchFamily="2" charset="-78"/>
+                <a:ea typeface="Amiri" pitchFamily="2" charset="-78"/>
                 <a:cs typeface="Amiri" pitchFamily="2" charset="-78"/>
               </a:rPr>
               <a:t>وَقَدْ أَدْرَكْتُ قِيمَةَ هٰذِهِ الظُّرُوفِ عِنْدَمَا قَارَنْتُهَا بِتَجْرِبَتِي فِي مَطْعَمٍ كَبِيرٍ قَبْلَ عَامَيْنِ؛ فَقَدْ كَانَ الأَجْرُ أَعْلَى، غَيْرَ أَنَّ المُدِيرَ كَانَ يَصْرُخُ عَلَى المُوَظَّفِينَ، وَكَانَتِ النَّوْبَاتُ تَمْتَدُّ إِلَى مُنْتَصَفِ اللَّيْلِ، فَاسْتَقَلْتُ بَعْدَ شَهْرٍ وَاحِدٍ.</a:t>
@@ -9413,6 +9481,7 @@
                   <a:srgbClr val="1F2A37"/>
                 </a:solidFill>
                 <a:latin typeface="Amiri" pitchFamily="2" charset="-78"/>
+                <a:ea typeface="Amiri" pitchFamily="2" charset="-78"/>
                 <a:cs typeface="Amiri" pitchFamily="2" charset="-78"/>
               </a:rPr>
               <a:t>صَحِيحٌ أَنَّ المَالَ ضَرُورِيٌّ، غَيْرَ أَنَّ الاحْتِرَامَ فِي مَكَانِ العَمَلِ لَا يُقَدَّرُ بِثَمَنٍ. وَلَوْ عَرَضَ عَلَيَّ أَحَدٌ ضِعْفَ أَجْرِي لِأَعْمَلَ فِي مَكَانٍ لَا أَشْعُرُ فِيهِ بِالتَّقْدِيرِ، لَرَفَضْتُ دُونَ تَرَدُّدٍ.</a:t>
@@ -9511,11 +9580,12 @@
               <a:buNone/>
             </a:pPr>
             <a:r>
-              <a:rPr lang="en-US" sz="950" b="1" dirty="0">
+              <a:rPr lang="ar-SA" sz="950" b="1" dirty="0">
                 <a:solidFill>
                   <a:srgbClr val="FFFFFF"/>
                 </a:solidFill>
                 <a:latin typeface="Calibri" pitchFamily="34" charset="0"/>
+                <a:ea typeface="Amiri" pitchFamily="2" charset="-78"/>
                 <a:cs typeface="Amiri" pitchFamily="2" charset="-78"/>
               </a:rPr>
               <a:t>لَمْ أَكُنْ أَتَخَيَّلُ</a:t>
@@ -9576,11 +9646,12 @@
               <a:buNone/>
             </a:pPr>
             <a:r>
-              <a:rPr lang="en-US" sz="950" b="1" dirty="0">
+              <a:rPr lang="ar-SA" sz="950" b="1" dirty="0">
                 <a:solidFill>
                   <a:srgbClr val="FFFFFF"/>
                 </a:solidFill>
                 <a:latin typeface="Calibri" pitchFamily="34" charset="0"/>
+                <a:ea typeface="Amiri" pitchFamily="2" charset="-78"/>
                 <a:cs typeface="Amiri" pitchFamily="2" charset="-78"/>
               </a:rPr>
               <a:t>مَعَ أَنَّ … فَإِنَّ</a:t>
@@ -9641,11 +9712,12 @@
               <a:buNone/>
             </a:pPr>
             <a:r>
-              <a:rPr lang="en-US" sz="950" b="1" dirty="0">
+              <a:rPr lang="ar-SA" sz="950" b="1" dirty="0">
                 <a:solidFill>
                   <a:srgbClr val="FFFFFF"/>
                 </a:solidFill>
                 <a:latin typeface="Calibri" pitchFamily="34" charset="0"/>
+                <a:ea typeface="Amiri" pitchFamily="2" charset="-78"/>
                 <a:cs typeface="Amiri" pitchFamily="2" charset="-78"/>
               </a:rPr>
               <a:t>كَانَ يَصْرُخُ</a:t>
@@ -9706,11 +9778,12 @@
               <a:buNone/>
             </a:pPr>
             <a:r>
-              <a:rPr lang="en-US" sz="950" b="1" dirty="0">
+              <a:rPr lang="ar-SA" sz="950" b="1" dirty="0">
                 <a:solidFill>
                   <a:srgbClr val="FFFFFF"/>
                 </a:solidFill>
                 <a:latin typeface="Calibri" pitchFamily="34" charset="0"/>
+                <a:ea typeface="Amiri" pitchFamily="2" charset="-78"/>
                 <a:cs typeface="Amiri" pitchFamily="2" charset="-78"/>
               </a:rPr>
               <a:t>لَوْ عَرَضَ … لَرَفَضْتُ</a:t>
@@ -9844,6 +9917,7 @@
                   <a:srgbClr val="D4AF37"/>
                 </a:solidFill>
                 <a:latin typeface="Amiri" pitchFamily="2" charset="-78"/>
+                <a:ea typeface="Amiri" pitchFamily="2" charset="-78"/>
                 <a:cs typeface="Amiri" pitchFamily="2" charset="-78"/>
               </a:rPr>
               <a:t>م</a:t>
@@ -10101,6 +10175,7 @@
                   <a:srgbClr val="8A6D1E"/>
                 </a:solidFill>
                 <a:latin typeface="Amiri" pitchFamily="2" charset="-78"/>
+                <a:ea typeface="Amiri" pitchFamily="2" charset="-78"/>
                 <a:cs typeface="Amiri" pitchFamily="2" charset="-78"/>
               </a:rPr>
               <a:t>ب</a:t>
@@ -10165,6 +10240,7 @@
                   <a:srgbClr val="1B3B6F"/>
                 </a:solidFill>
                 <a:latin typeface="Amiri" pitchFamily="2" charset="-78"/>
+                <a:ea typeface="Amiri" pitchFamily="2" charset="-78"/>
                 <a:cs typeface="Amiri" pitchFamily="2" charset="-78"/>
               </a:rPr>
               <a:t>ب</a:t>
@@ -10216,6 +10292,7 @@
                   <a:srgbClr val="8A6D1E"/>
                 </a:solidFill>
                 <a:latin typeface="Amiri" pitchFamily="2" charset="-78"/>
+                <a:ea typeface="Amiri" pitchFamily="2" charset="-78"/>
                 <a:cs typeface="Amiri" pitchFamily="2" charset="-78"/>
               </a:rPr>
               <a:t>نَمُوذَجُ الإِجَابَةِ</a:t>
@@ -10329,6 +10406,7 @@
                   <a:srgbClr val="1F2A37"/>
                 </a:solidFill>
                 <a:latin typeface="Amiri" pitchFamily="2" charset="-78"/>
+                <a:ea typeface="Amiri" pitchFamily="2" charset="-78"/>
                 <a:cs typeface="Amiri" pitchFamily="2" charset="-78"/>
               </a:rPr>
               <a:t>قَبْلَ جِيلٍ وَاحِدٍ، كَانَ العَمَلُ يَعْنِي مَكْتَبًا ثَابِتًا، وَسَاعَاتٍ مِنَ التَّاسِعَةِ إِلَى الخَامِسَةِ، وَوَظِيفَةً تَدُومُ مَدَى الحَيَاةِ. أَمَّا اليَوْمَ، فَتَتَغَيَّرُ أَمَاكِنُ العَمَلِ وَظُرُوفُهُ بِسُرْعَةٍ مُذْهِلَةٍ. فَهَلْ هٰذَا التَّغْيِيرُ فِي صَالِحِ العُمَّالِ؟</a:t>
@@ -10348,6 +10426,7 @@
                   <a:srgbClr val="1F2A37"/>
                 </a:solidFill>
                 <a:latin typeface="Amiri" pitchFamily="2" charset="-78"/>
+                <a:ea typeface="Amiri" pitchFamily="2" charset="-78"/>
                 <a:cs typeface="Amiri" pitchFamily="2" charset="-78"/>
               </a:rPr>
               <a:t>مِنْ نَاحِيَةٍ، أَصْبَحَ كَثِيرٌ مِنَ المُوَظَّفِينَ يَعْمَلُونَ مِنَ البَيْتِ، مِمَّا يُوَفِّرُ سَاعَاتِ المُوَاصَلَاتِ، وَيُتِيحُ وَقْتًا أَطْوَلَ مَعَ الأُسْرَةِ. وَمِنْ نَاحِيَةٍ أُخْرَى، انْتَشَرَتْ وَظَائِفُ مُؤَقَّتَةٌ بِلَا عُطَلٍ مَدْفُوعَةٍ وَلَا تَأْمِينٍ صِحِّيٍّ، خُصُوصًا فِي التَّوْصِيلِ وَالتَّطْبِيقَاتِ.</a:t>
@@ -10367,6 +10446,7 @@
                   <a:srgbClr val="1F2A37"/>
                 </a:solidFill>
                 <a:latin typeface="Amiri" pitchFamily="2" charset="-78"/>
+                <a:ea typeface="Amiri" pitchFamily="2" charset="-78"/>
                 <a:cs typeface="Amiri" pitchFamily="2" charset="-78"/>
               </a:rPr>
               <a:t>وَقَدْ رَأَيْتُ الوَجْهَيْنِ فِي أُسْرَتِي؛ فَأُمِّي تَعْمَلُ مِنَ البَيْتِ ثَلَاثَةَ أَيَّامٍ فِي الأُسْبُوعِ، وَتَقُولُ إِنَّهَا أَصْبَحَتْ أَكْثَرَ إِنْتَاجًا وَرَاحَةً، بَيْنَمَا يَعْمَلُ ابْنُ خَالَتِي سَائِقَ تَوْصِيلٍ اثْنَتَيْ عَشْرَةَ سَاعَةً يَوْمِيًّا، دُونَ أَنْ يَعْرِفَ كَمْ سَيَكْسِبُ آخِرَ الشَّهْرِ.</a:t>
@@ -10386,6 +10466,7 @@
                   <a:srgbClr val="1F2A37"/>
                 </a:solidFill>
                 <a:latin typeface="Amiri" pitchFamily="2" charset="-78"/>
+                <a:ea typeface="Amiri" pitchFamily="2" charset="-78"/>
                 <a:cs typeface="Amiri" pitchFamily="2" charset="-78"/>
               </a:rPr>
               <a:t>صَحِيحٌ أَنَّ المُرُونَةَ مِيزَةٌ كَبِيرَةٌ، غَيْرَ أَنَّهَا لَا يَجِبُ أَنْ تَكُونَ عَلَى حِسَابِ حُقُوقِ العُمَّالِ. وَإِذَا وَضَعَتِ الحُكُومَاتُ قَوَانِينَ تَحْمِي هٰذِهِ الوَظَائِفَ الجَدِيدَةَ، فَسَيَجْمَعُ عَالَمُ العَمَلِ بَيْنَ الحُرِّيَّةِ وَالأَمَانِ.</a:t>
@@ -10484,11 +10565,12 @@
               <a:buNone/>
             </a:pPr>
             <a:r>
-              <a:rPr lang="en-US" sz="950" b="1" dirty="0">
+              <a:rPr lang="ar-SA" sz="950" b="1" dirty="0">
                 <a:solidFill>
                   <a:srgbClr val="FFFFFF"/>
                 </a:solidFill>
                 <a:latin typeface="Calibri" pitchFamily="34" charset="0"/>
+                <a:ea typeface="Amiri" pitchFamily="2" charset="-78"/>
                 <a:cs typeface="Amiri" pitchFamily="2" charset="-78"/>
               </a:rPr>
               <a:t>أَمَّا اليَوْمَ، فَتَتَغَيَّرُ</a:t>
@@ -10549,11 +10631,12 @@
               <a:buNone/>
             </a:pPr>
             <a:r>
-              <a:rPr lang="en-US" sz="950" b="1" dirty="0">
+              <a:rPr lang="ar-SA" sz="950" b="1" dirty="0">
                 <a:solidFill>
                   <a:srgbClr val="FFFFFF"/>
                 </a:solidFill>
                 <a:latin typeface="Calibri" pitchFamily="34" charset="0"/>
+                <a:ea typeface="Amiri" pitchFamily="2" charset="-78"/>
                 <a:cs typeface="Amiri" pitchFamily="2" charset="-78"/>
               </a:rPr>
               <a:t>مِمَّا يُوَفِّرُ</a:t>
@@ -10614,11 +10697,12 @@
               <a:buNone/>
             </a:pPr>
             <a:r>
-              <a:rPr lang="en-US" sz="950" b="1" dirty="0">
+              <a:rPr lang="ar-SA" sz="950" b="1" dirty="0">
                 <a:solidFill>
                   <a:srgbClr val="FFFFFF"/>
                 </a:solidFill>
                 <a:latin typeface="Calibri" pitchFamily="34" charset="0"/>
+                <a:ea typeface="Amiri" pitchFamily="2" charset="-78"/>
                 <a:cs typeface="Amiri" pitchFamily="2" charset="-78"/>
               </a:rPr>
               <a:t>اثْنَتَيْ عَشْرَةَ سَاعَةً</a:t>
@@ -10679,11 +10763,12 @@
               <a:buNone/>
             </a:pPr>
             <a:r>
-              <a:rPr lang="en-US" sz="950" b="1" dirty="0">
+              <a:rPr lang="ar-SA" sz="950" b="1" dirty="0">
                 <a:solidFill>
                   <a:srgbClr val="FFFFFF"/>
                 </a:solidFill>
                 <a:latin typeface="Calibri" pitchFamily="34" charset="0"/>
+                <a:ea typeface="Amiri" pitchFamily="2" charset="-78"/>
                 <a:cs typeface="Amiri" pitchFamily="2" charset="-78"/>
               </a:rPr>
               <a:t>إِذَا وَضَعَتْ … فَسَيَجْمَعُ</a:t>
@@ -10817,6 +10902,7 @@
                   <a:srgbClr val="D4AF37"/>
                 </a:solidFill>
                 <a:latin typeface="Amiri" pitchFamily="2" charset="-78"/>
+                <a:ea typeface="Amiri" pitchFamily="2" charset="-78"/>
                 <a:cs typeface="Amiri" pitchFamily="2" charset="-78"/>
               </a:rPr>
               <a:t>م</a:t>
@@ -11137,6 +11223,7 @@
                   <a:srgbClr val="8A6D1E"/>
                 </a:solidFill>
                 <a:latin typeface="Amiri" pitchFamily="2" charset="-78"/>
+                <a:ea typeface="Amiri" pitchFamily="2" charset="-78"/>
                 <a:cs typeface="Amiri" pitchFamily="2" charset="-78"/>
               </a:rPr>
               <a:t>قَيِّمْ عَمَلَكَ</a:t>
@@ -12381,6 +12468,7 @@
                   <a:srgbClr val="FFFFFF"/>
                 </a:solidFill>
                 <a:latin typeface="Amiri" pitchFamily="2" charset="-78"/>
+                <a:ea typeface="Amiri" pitchFamily="2" charset="-78"/>
                 <a:cs typeface="Amiri" pitchFamily="2" charset="-78"/>
               </a:rPr>
               <a:t>أَحْسَنْتُمْ! إِلَى اللِّقَاءِ</a:t>
@@ -12533,6 +12621,7 @@
                   <a:srgbClr val="D4AF37"/>
                 </a:solidFill>
                 <a:latin typeface="Amiri" pitchFamily="2" charset="-78"/>
+                <a:ea typeface="Amiri" pitchFamily="2" charset="-78"/>
                 <a:cs typeface="Amiri" pitchFamily="2" charset="-78"/>
               </a:rPr>
               <a:t>وَرْشَةُ التَّدْرِيبِ</a:t>
@@ -12666,6 +12755,7 @@
                   <a:srgbClr val="D4AF37"/>
                 </a:solidFill>
                 <a:latin typeface="Amiri" pitchFamily="2" charset="-78"/>
+                <a:ea typeface="Amiri" pitchFamily="2" charset="-78"/>
                 <a:cs typeface="Amiri" pitchFamily="2" charset="-78"/>
               </a:rPr>
               <a:t>م</a:t>
@@ -12986,6 +13076,7 @@
                   <a:srgbClr val="8A6D1E"/>
                 </a:solidFill>
                 <a:latin typeface="Amiri" pitchFamily="2" charset="-78"/>
+                <a:ea typeface="Amiri" pitchFamily="2" charset="-78"/>
                 <a:cs typeface="Amiri" pitchFamily="2" charset="-78"/>
               </a:rPr>
               <a:t>آدَابُ الصَّفِّ</a:t>
@@ -14517,6 +14608,7 @@
                   <a:srgbClr val="D4AF37"/>
                 </a:solidFill>
                 <a:latin typeface="Amiri" pitchFamily="2" charset="-78"/>
+                <a:ea typeface="Amiri" pitchFamily="2" charset="-78"/>
                 <a:cs typeface="Amiri" pitchFamily="2" charset="-78"/>
               </a:rPr>
               <a:t>م</a:t>
@@ -14837,6 +14929,7 @@
                   <a:srgbClr val="8A6D1E"/>
                 </a:solidFill>
                 <a:latin typeface="Amiri" pitchFamily="2" charset="-78"/>
+                <a:ea typeface="Amiri" pitchFamily="2" charset="-78"/>
                 <a:cs typeface="Amiri" pitchFamily="2" charset="-78"/>
               </a:rPr>
               <a:t>خَرِيطَةُ الوَرْشَةِ</a:t>
@@ -15151,6 +15244,7 @@
                   <a:srgbClr val="1B3B6F"/>
                 </a:solidFill>
                 <a:latin typeface="Amiri" pitchFamily="2" charset="-78"/>
+                <a:ea typeface="Amiri" pitchFamily="2" charset="-78"/>
                 <a:cs typeface="Amiri" pitchFamily="2" charset="-78"/>
               </a:rPr>
               <a:t>كَيْفَ</a:t>
@@ -15427,6 +15521,7 @@
                   <a:srgbClr val="1E6B52"/>
                 </a:solidFill>
                 <a:latin typeface="Amiri" pitchFamily="2" charset="-78"/>
+                <a:ea typeface="Amiri" pitchFamily="2" charset="-78"/>
                 <a:cs typeface="Amiri" pitchFamily="2" charset="-78"/>
               </a:rPr>
               <a:t>الاسْتِمَارَةُ</a:t>
@@ -15703,6 +15798,7 @@
                   <a:srgbClr val="1E6B52"/>
                 </a:solidFill>
                 <a:latin typeface="Amiri" pitchFamily="2" charset="-78"/>
+                <a:ea typeface="Amiri" pitchFamily="2" charset="-78"/>
                 <a:cs typeface="Amiri" pitchFamily="2" charset="-78"/>
               </a:rPr>
               <a:t>الرِّسَالَةُ</a:t>
@@ -15979,6 +16075,7 @@
                   <a:srgbClr val="1E6B52"/>
                 </a:solidFill>
                 <a:latin typeface="Amiri" pitchFamily="2" charset="-78"/>
+                <a:ea typeface="Amiri" pitchFamily="2" charset="-78"/>
                 <a:cs typeface="Amiri" pitchFamily="2" charset="-78"/>
               </a:rPr>
               <a:t>المَقَالُ</a:t>
@@ -16255,6 +16352,7 @@
                   <a:srgbClr val="8A6D1E"/>
                 </a:solidFill>
                 <a:latin typeface="Amiri" pitchFamily="2" charset="-78"/>
+                <a:ea typeface="Amiri" pitchFamily="2" charset="-78"/>
                 <a:cs typeface="Amiri" pitchFamily="2" charset="-78"/>
               </a:rPr>
               <a:t>قَيِّمْ</a:t>
@@ -16498,6 +16596,7 @@
                   <a:srgbClr val="D4AF37"/>
                 </a:solidFill>
                 <a:latin typeface="Amiri" pitchFamily="2" charset="-78"/>
+                <a:ea typeface="Amiri" pitchFamily="2" charset="-78"/>
                 <a:cs typeface="Amiri" pitchFamily="2" charset="-78"/>
               </a:rPr>
               <a:t>م</a:t>
@@ -16818,6 +16917,7 @@
                   <a:srgbClr val="8A6D1E"/>
                 </a:solidFill>
                 <a:latin typeface="Amiri" pitchFamily="2" charset="-78"/>
+                <a:ea typeface="Amiri" pitchFamily="2" charset="-78"/>
                 <a:cs typeface="Amiri" pitchFamily="2" charset="-78"/>
               </a:rPr>
               <a:t>امْتِحَانُ الكِتَابَةِ</a:t>
@@ -17442,6 +17542,7 @@
                   <a:srgbClr val="1B3B6F"/>
                 </a:solidFill>
                 <a:latin typeface="Amiri" pitchFamily="2" charset="-78"/>
+                <a:ea typeface="Amiri" pitchFamily="2" charset="-78"/>
                 <a:cs typeface="Amiri" pitchFamily="2" charset="-78"/>
               </a:rPr>
               <a:t>أَعْمَلُ كُلَّ سَبْتٍ مِنَ التَّاسِعَةِ إِلَى الثَّالِثَةِ</a:t>
@@ -17541,6 +17642,7 @@
                   <a:srgbClr val="1B3B6F"/>
                 </a:solidFill>
                 <a:latin typeface="Amiri" pitchFamily="2" charset="-78"/>
+                <a:ea typeface="Amiri" pitchFamily="2" charset="-78"/>
                 <a:cs typeface="Amiri" pitchFamily="2" charset="-78"/>
               </a:rPr>
               <a:t>كَانَتِ السَّاعَاتُ أَطْوَلَ، وَكَانَ المُدِيرُ صَارِمًا</a:t>
@@ -17640,6 +17742,7 @@
                   <a:srgbClr val="1B3B6F"/>
                 </a:solidFill>
                 <a:latin typeface="Amiri" pitchFamily="2" charset="-78"/>
+                <a:ea typeface="Amiri" pitchFamily="2" charset="-78"/>
                 <a:cs typeface="Amiri" pitchFamily="2" charset="-78"/>
               </a:rPr>
               <a:t>ظُرُوفُ العَمَلِ أَهَمُّ مِنَ الرَّاتِبِ</a:t>
@@ -17811,6 +17914,7 @@
                   <a:srgbClr val="D4AF37"/>
                 </a:solidFill>
                 <a:latin typeface="Amiri" pitchFamily="2" charset="-78"/>
+                <a:ea typeface="Amiri" pitchFamily="2" charset="-78"/>
                 <a:cs typeface="Amiri" pitchFamily="2" charset="-78"/>
               </a:rPr>
               <a:t>م</a:t>
@@ -18131,6 +18235,7 @@
                   <a:srgbClr val="8A6D1E"/>
                 </a:solidFill>
                 <a:latin typeface="Amiri" pitchFamily="2" charset="-78"/>
+                <a:ea typeface="Amiri" pitchFamily="2" charset="-78"/>
                 <a:cs typeface="Amiri" pitchFamily="2" charset="-78"/>
               </a:rPr>
               <a:t>طَلَبُ عَمَلٍ جُزْئِيٍّ</a:t>
@@ -18487,6 +18592,7 @@
                   <a:srgbClr val="1B3B6F"/>
                 </a:solidFill>
                 <a:latin typeface="Amiri" pitchFamily="2" charset="-78"/>
+                <a:ea typeface="Amiri" pitchFamily="2" charset="-78"/>
                 <a:cs typeface="Amiri" pitchFamily="2" charset="-78"/>
               </a:rPr>
               <a:t>الاسْمُ وَالعُمْرُ</a:t>
@@ -18731,6 +18837,7 @@
                   <a:srgbClr val="1B3B6F"/>
                 </a:solidFill>
                 <a:latin typeface="Amiri" pitchFamily="2" charset="-78"/>
+                <a:ea typeface="Amiri" pitchFamily="2" charset="-78"/>
                 <a:cs typeface="Amiri" pitchFamily="2" charset="-78"/>
               </a:rPr>
               <a:t>الوَظِيفَةُ المَطْلُوبَةُ</a:t>
@@ -18975,6 +19082,7 @@
                   <a:srgbClr val="1B3B6F"/>
                 </a:solidFill>
                 <a:latin typeface="Amiri" pitchFamily="2" charset="-78"/>
+                <a:ea typeface="Amiri" pitchFamily="2" charset="-78"/>
                 <a:cs typeface="Amiri" pitchFamily="2" charset="-78"/>
               </a:rPr>
               <a:t>الأَيَّامُ المُتَاحَةُ</a:t>
@@ -19219,6 +19327,7 @@
                   <a:srgbClr val="1B3B6F"/>
                 </a:solidFill>
                 <a:latin typeface="Amiri" pitchFamily="2" charset="-78"/>
+                <a:ea typeface="Amiri" pitchFamily="2" charset="-78"/>
                 <a:cs typeface="Amiri" pitchFamily="2" charset="-78"/>
               </a:rPr>
               <a:t>السَّاعَاتُ المُتَاحَةُ</a:t>
@@ -19463,6 +19572,7 @@
                   <a:srgbClr val="1B3B6F"/>
                 </a:solidFill>
                 <a:latin typeface="Amiri" pitchFamily="2" charset="-78"/>
+                <a:ea typeface="Amiri" pitchFamily="2" charset="-78"/>
                 <a:cs typeface="Amiri" pitchFamily="2" charset="-78"/>
               </a:rPr>
               <a:t>العَمَلُ السَّابِقُ</a:t>
@@ -19707,6 +19817,7 @@
                   <a:srgbClr val="1B3B6F"/>
                 </a:solidFill>
                 <a:latin typeface="Amiri" pitchFamily="2" charset="-78"/>
+                <a:ea typeface="Amiri" pitchFamily="2" charset="-78"/>
                 <a:cs typeface="Amiri" pitchFamily="2" charset="-78"/>
               </a:rPr>
               <a:t>مُدَّةُ العَمَلِ السَّابِقِ</a:t>
@@ -19951,6 +20062,7 @@
                   <a:srgbClr val="1B3B6F"/>
                 </a:solidFill>
                 <a:latin typeface="Amiri" pitchFamily="2" charset="-78"/>
+                <a:ea typeface="Amiri" pitchFamily="2" charset="-78"/>
                 <a:cs typeface="Amiri" pitchFamily="2" charset="-78"/>
               </a:rPr>
               <a:t>لِمَاذَا تَرَكْتَ عَمَلَكَ السَّابِقَ؟</a:t>
@@ -20130,6 +20242,7 @@
                   <a:srgbClr val="1B3B6F"/>
                 </a:solidFill>
                 <a:latin typeface="Amiri" pitchFamily="2" charset="-78"/>
+                <a:ea typeface="Amiri" pitchFamily="2" charset="-78"/>
                 <a:cs typeface="Amiri" pitchFamily="2" charset="-78"/>
               </a:rPr>
               <a:t>جُمْلَةٌ: لِمَاذَا تُنَاسِبُكَ هٰذِهِ الوَظِيفَةُ؟</a:t>
@@ -20339,6 +20452,7 @@
                   <a:srgbClr val="D4AF37"/>
                 </a:solidFill>
                 <a:latin typeface="Amiri" pitchFamily="2" charset="-78"/>
+                <a:ea typeface="Amiri" pitchFamily="2" charset="-78"/>
                 <a:cs typeface="Amiri" pitchFamily="2" charset="-78"/>
               </a:rPr>
               <a:t>م</a:t>
@@ -20659,6 +20773,7 @@
                   <a:srgbClr val="8A6D1E"/>
                 </a:solidFill>
                 <a:latin typeface="Amiri" pitchFamily="2" charset="-78"/>
+                <a:ea typeface="Amiri" pitchFamily="2" charset="-78"/>
                 <a:cs typeface="Amiri" pitchFamily="2" charset="-78"/>
               </a:rPr>
               <a:t>نَمُوذَجُ الإِجَابَةِ</a:t>
@@ -20977,6 +21092,7 @@
                   <a:srgbClr val="1B3B6F"/>
                 </a:solidFill>
                 <a:latin typeface="Amiri" pitchFamily="2" charset="-78"/>
+                <a:ea typeface="Amiri" pitchFamily="2" charset="-78"/>
                 <a:cs typeface="Amiri" pitchFamily="2" charset="-78"/>
               </a:rPr>
               <a:t>مَازِنٌ سَعِيدٌ، سَبْعَ عَشْرَةَ سَنَةً</a:t>
@@ -21015,6 +21131,7 @@
                   <a:srgbClr val="1B3B6F"/>
                 </a:solidFill>
                 <a:latin typeface="Amiri" pitchFamily="2" charset="-78"/>
+                <a:ea typeface="Amiri" pitchFamily="2" charset="-78"/>
                 <a:cs typeface="Amiri" pitchFamily="2" charset="-78"/>
               </a:rPr>
               <a:t>الاسْمُ وَالعُمْرُ</a:t>
@@ -21156,6 +21273,7 @@
                   <a:srgbClr val="1B3B6F"/>
                 </a:solidFill>
                 <a:latin typeface="Amiri" pitchFamily="2" charset="-78"/>
+                <a:ea typeface="Amiri" pitchFamily="2" charset="-78"/>
                 <a:cs typeface="Amiri" pitchFamily="2" charset="-78"/>
               </a:rPr>
               <a:t>مُسَاعِدٌ فِي مَكْتَبَةٍ</a:t>
@@ -21194,6 +21312,7 @@
                   <a:srgbClr val="1B3B6F"/>
                 </a:solidFill>
                 <a:latin typeface="Amiri" pitchFamily="2" charset="-78"/>
+                <a:ea typeface="Amiri" pitchFamily="2" charset="-78"/>
                 <a:cs typeface="Amiri" pitchFamily="2" charset="-78"/>
               </a:rPr>
               <a:t>الوَظِيفَةُ المَطْلُوبَةُ</a:t>
@@ -21335,6 +21454,7 @@
                   <a:srgbClr val="1B3B6F"/>
                 </a:solidFill>
                 <a:latin typeface="Amiri" pitchFamily="2" charset="-78"/>
+                <a:ea typeface="Amiri" pitchFamily="2" charset="-78"/>
                 <a:cs typeface="Amiri" pitchFamily="2" charset="-78"/>
               </a:rPr>
               <a:t>السَّبْتُ وَالأَحَدُ</a:t>
@@ -21373,6 +21493,7 @@
                   <a:srgbClr val="1B3B6F"/>
                 </a:solidFill>
                 <a:latin typeface="Amiri" pitchFamily="2" charset="-78"/>
+                <a:ea typeface="Amiri" pitchFamily="2" charset="-78"/>
                 <a:cs typeface="Amiri" pitchFamily="2" charset="-78"/>
               </a:rPr>
               <a:t>الأَيَّامُ المُتَاحَةُ</a:t>
@@ -21514,6 +21635,7 @@
                   <a:srgbClr val="1B3B6F"/>
                 </a:solidFill>
                 <a:latin typeface="Amiri" pitchFamily="2" charset="-78"/>
+                <a:ea typeface="Amiri" pitchFamily="2" charset="-78"/>
                 <a:cs typeface="Amiri" pitchFamily="2" charset="-78"/>
               </a:rPr>
               <a:t>مِنَ التَّاسِعَةِ إِلَى الثَّالِثَةِ</a:t>
@@ -21552,6 +21674,7 @@
                   <a:srgbClr val="1B3B6F"/>
                 </a:solidFill>
                 <a:latin typeface="Amiri" pitchFamily="2" charset="-78"/>
+                <a:ea typeface="Amiri" pitchFamily="2" charset="-78"/>
                 <a:cs typeface="Amiri" pitchFamily="2" charset="-78"/>
               </a:rPr>
               <a:t>السَّاعَاتُ المُتَاحَةُ</a:t>
@@ -21693,6 +21816,7 @@
                   <a:srgbClr val="1B3B6F"/>
                 </a:solidFill>
                 <a:latin typeface="Amiri" pitchFamily="2" charset="-78"/>
+                <a:ea typeface="Amiri" pitchFamily="2" charset="-78"/>
                 <a:cs typeface="Amiri" pitchFamily="2" charset="-78"/>
               </a:rPr>
               <a:t>نَادِلٌ فِي مَطْعَمٍ</a:t>
@@ -21731,6 +21855,7 @@
                   <a:srgbClr val="1B3B6F"/>
                 </a:solidFill>
                 <a:latin typeface="Amiri" pitchFamily="2" charset="-78"/>
+                <a:ea typeface="Amiri" pitchFamily="2" charset="-78"/>
                 <a:cs typeface="Amiri" pitchFamily="2" charset="-78"/>
               </a:rPr>
               <a:t>العَمَلُ السَّابِقُ</a:t>
@@ -21872,6 +21997,7 @@
                   <a:srgbClr val="1B3B6F"/>
                 </a:solidFill>
                 <a:latin typeface="Amiri" pitchFamily="2" charset="-78"/>
+                <a:ea typeface="Amiri" pitchFamily="2" charset="-78"/>
                 <a:cs typeface="Amiri" pitchFamily="2" charset="-78"/>
               </a:rPr>
               <a:t>شَهْرَانِ</a:t>
@@ -21910,6 +22036,7 @@
                   <a:srgbClr val="1B3B6F"/>
                 </a:solidFill>
                 <a:latin typeface="Amiri" pitchFamily="2" charset="-78"/>
+                <a:ea typeface="Amiri" pitchFamily="2" charset="-78"/>
                 <a:cs typeface="Amiri" pitchFamily="2" charset="-78"/>
               </a:rPr>
               <a:t>مُدَّةُ العَمَلِ السَّابِقِ</a:t>
@@ -22051,6 +22178,7 @@
                   <a:srgbClr val="1B3B6F"/>
                 </a:solidFill>
                 <a:latin typeface="Amiri" pitchFamily="2" charset="-78"/>
+                <a:ea typeface="Amiri" pitchFamily="2" charset="-78"/>
                 <a:cs typeface="Amiri" pitchFamily="2" charset="-78"/>
               </a:rPr>
               <a:t>كَانَتِ النَّوْبَاتُ طَوِيلَةً جِدًّا</a:t>
@@ -22089,6 +22217,7 @@
                   <a:srgbClr val="1B3B6F"/>
                 </a:solidFill>
                 <a:latin typeface="Amiri" pitchFamily="2" charset="-78"/>
+                <a:ea typeface="Amiri" pitchFamily="2" charset="-78"/>
                 <a:cs typeface="Amiri" pitchFamily="2" charset="-78"/>
               </a:rPr>
               <a:t>لِمَاذَا تَرَكْتَ عَمَلَكَ السَّابِقَ؟</a:t>
@@ -22230,6 +22359,7 @@
                   <a:srgbClr val="1B3B6F"/>
                 </a:solidFill>
                 <a:latin typeface="Amiri" pitchFamily="2" charset="-78"/>
+                <a:ea typeface="Amiri" pitchFamily="2" charset="-78"/>
                 <a:cs typeface="Amiri" pitchFamily="2" charset="-78"/>
               </a:rPr>
               <a:t>تُنَاسِبُنِي لِأَنَّ المَكْتَبَةَ أَهْدَأُ مِنَ المَطْعَمِ، وَأَنَا أُحِبُّ القِرَاءَةَ.</a:t>
@@ -22268,6 +22398,7 @@
                   <a:srgbClr val="1B3B6F"/>
                 </a:solidFill>
                 <a:latin typeface="Amiri" pitchFamily="2" charset="-78"/>
+                <a:ea typeface="Amiri" pitchFamily="2" charset="-78"/>
                 <a:cs typeface="Amiri" pitchFamily="2" charset="-78"/>
               </a:rPr>
               <a:t>جُمْلَةٌ: لِمَاذَا تُنَاسِبُكَ هٰذِهِ الوَظِيفَةُ؟</a:t>
@@ -22477,6 +22608,7 @@
                   <a:srgbClr val="D4AF37"/>
                 </a:solidFill>
                 <a:latin typeface="Amiri" pitchFamily="2" charset="-78"/>
+                <a:ea typeface="Amiri" pitchFamily="2" charset="-78"/>
                 <a:cs typeface="Amiri" pitchFamily="2" charset="-78"/>
               </a:rPr>
               <a:t>م</a:t>
@@ -22797,6 +22929,7 @@
                   <a:srgbClr val="8A6D1E"/>
                 </a:solidFill>
                 <a:latin typeface="Amiri" pitchFamily="2" charset="-78"/>
+                <a:ea typeface="Amiri" pitchFamily="2" charset="-78"/>
                 <a:cs typeface="Amiri" pitchFamily="2" charset="-78"/>
               </a:rPr>
               <a:t>عَمَلِي الجُزْئِيُّ الجَدِيدُ</a:t>
@@ -23272,6 +23405,7 @@
                   <a:srgbClr val="1B3B6F"/>
                 </a:solidFill>
                 <a:latin typeface="Amiri" pitchFamily="2" charset="-78"/>
+                <a:ea typeface="Amiri" pitchFamily="2" charset="-78"/>
                 <a:cs typeface="Amiri" pitchFamily="2" charset="-78"/>
               </a:rPr>
               <a:t>وَجَدْتُ عَمَلًا جُزْئِيًّا فِي …</a:t>
@@ -23348,6 +23482,7 @@
                   <a:srgbClr val="1B3B6F"/>
                 </a:solidFill>
                 <a:latin typeface="Amiri" pitchFamily="2" charset="-78"/>
+                <a:ea typeface="Amiri" pitchFamily="2" charset="-78"/>
                 <a:cs typeface="Amiri" pitchFamily="2" charset="-78"/>
               </a:rPr>
               <a:t>أَعْمَلُ يَوْمَ … مِنَ … إِلَى …</a:t>
@@ -23424,6 +23559,7 @@
                   <a:srgbClr val="1B3B6F"/>
                 </a:solidFill>
                 <a:latin typeface="Amiri" pitchFamily="2" charset="-78"/>
+                <a:ea typeface="Amiri" pitchFamily="2" charset="-78"/>
                 <a:cs typeface="Amiri" pitchFamily="2" charset="-78"/>
               </a:rPr>
               <a:t>كُنْتُ أَعْمَلُ فِي … وَكَانَ العَمَلُ …</a:t>
@@ -23500,6 +23636,7 @@
                   <a:srgbClr val="1B3B6F"/>
                 </a:solidFill>
                 <a:latin typeface="Amiri" pitchFamily="2" charset="-78"/>
+                <a:ea typeface="Amiri" pitchFamily="2" charset="-78"/>
                 <a:cs typeface="Amiri" pitchFamily="2" charset="-78"/>
               </a:rPr>
               <a:t>بِالمَالِ سَأَشْتَرِي …</a:t>
@@ -23671,6 +23808,7 @@
                   <a:srgbClr val="D4AF37"/>
                 </a:solidFill>
                 <a:latin typeface="Amiri" pitchFamily="2" charset="-78"/>
+                <a:ea typeface="Amiri" pitchFamily="2" charset="-78"/>
                 <a:cs typeface="Amiri" pitchFamily="2" charset="-78"/>
               </a:rPr>
               <a:t>م</a:t>
@@ -23991,6 +24129,7 @@
                   <a:srgbClr val="8A6D1E"/>
                 </a:solidFill>
                 <a:latin typeface="Amiri" pitchFamily="2" charset="-78"/>
+                <a:ea typeface="Amiri" pitchFamily="2" charset="-78"/>
                 <a:cs typeface="Amiri" pitchFamily="2" charset="-78"/>
               </a:rPr>
               <a:t>نَصُّ السُّؤَالِ</a:t>
@@ -24271,6 +24410,7 @@
                   <a:srgbClr val="1B3B6F"/>
                 </a:solidFill>
                 <a:latin typeface="Amiri" pitchFamily="2" charset="-78"/>
+                <a:ea typeface="Amiri" pitchFamily="2" charset="-78"/>
                 <a:cs typeface="Amiri" pitchFamily="2" charset="-78"/>
               </a:rPr>
               <a:t>بَدَأْتَ عَمَلًا جُزْئِيًّا. اكْتُبْ رِسَالَةً إِلَى صَدِيقِكَ (٨٠–٩٠ كَلِمَةً).</a:t>
@@ -24412,6 +24552,7 @@
                   <a:srgbClr val="1B3B6F"/>
                 </a:solidFill>
                 <a:latin typeface="Amiri" pitchFamily="2" charset="-78"/>
+                <a:ea typeface="Amiri" pitchFamily="2" charset="-78"/>
                 <a:cs typeface="Amiri" pitchFamily="2" charset="-78"/>
               </a:rPr>
               <a:t>أَيْنَ تَعْمَلُ؟ وَمَا سَاعَاتُكَ وَأَجْرُكَ؟</a:t>
@@ -24553,6 +24694,7 @@
                   <a:srgbClr val="1B3B6F"/>
                 </a:solidFill>
                 <a:latin typeface="Amiri" pitchFamily="2" charset="-78"/>
+                <a:ea typeface="Amiri" pitchFamily="2" charset="-78"/>
                 <a:cs typeface="Amiri" pitchFamily="2" charset="-78"/>
               </a:rPr>
               <a:t>مَاذَا تَفْعَلُ هُنَاكَ؟</a:t>
@@ -24694,6 +24836,7 @@
                   <a:srgbClr val="1B3B6F"/>
                 </a:solidFill>
                 <a:latin typeface="Amiri" pitchFamily="2" charset="-78"/>
+                <a:ea typeface="Amiri" pitchFamily="2" charset="-78"/>
                 <a:cs typeface="Amiri" pitchFamily="2" charset="-78"/>
               </a:rPr>
               <a:t>مَا العَمَلُ الَّذِي قُمْتَ بِهِ قَبْلَ ذٰلِكَ؟ وَكَيْفَ كَانَ؟</a:t>
@@ -24835,6 +24978,7 @@
                   <a:srgbClr val="1B3B6F"/>
                 </a:solidFill>
                 <a:latin typeface="Amiri" pitchFamily="2" charset="-78"/>
+                <a:ea typeface="Amiri" pitchFamily="2" charset="-78"/>
                 <a:cs typeface="Amiri" pitchFamily="2" charset="-78"/>
               </a:rPr>
               <a:t>مَا رَأْيُكَ فِي العَمَلِ الجَدِيدِ؟ وَمَاذَا سَتَفْعَلُ بِالمَالِ؟</a:t>
@@ -25044,6 +25188,7 @@
                   <a:srgbClr val="D4AF37"/>
                 </a:solidFill>
                 <a:latin typeface="Amiri" pitchFamily="2" charset="-78"/>
+                <a:ea typeface="Amiri" pitchFamily="2" charset="-78"/>
                 <a:cs typeface="Amiri" pitchFamily="2" charset="-78"/>
               </a:rPr>
               <a:t>م</a:t>
@@ -25364,6 +25509,7 @@
                   <a:srgbClr val="8A6D1E"/>
                 </a:solidFill>
                 <a:latin typeface="Amiri" pitchFamily="2" charset="-78"/>
+                <a:ea typeface="Amiri" pitchFamily="2" charset="-78"/>
                 <a:cs typeface="Amiri" pitchFamily="2" charset="-78"/>
               </a:rPr>
               <a:t>قَوَالِبُ الكِتَابَةِ</a:t>
@@ -25644,6 +25790,7 @@
                   <a:srgbClr val="1B3B6F"/>
                 </a:solidFill>
                 <a:latin typeface="Amiri" pitchFamily="2" charset="-78"/>
+                <a:ea typeface="Amiri" pitchFamily="2" charset="-78"/>
                 <a:cs typeface="Amiri" pitchFamily="2" charset="-78"/>
               </a:rPr>
               <a:t>مَرْحَبًا يَا ______ ، كَيْفَ حَالُكَ؟</a:t>
@@ -25850,6 +25997,7 @@
                   <a:srgbClr val="1B3B6F"/>
                 </a:solidFill>
                 <a:latin typeface="Amiri" pitchFamily="2" charset="-78"/>
+                <a:ea typeface="Amiri" pitchFamily="2" charset="-78"/>
                 <a:cs typeface="Amiri" pitchFamily="2" charset="-78"/>
               </a:rPr>
               <a:t>وَجَدْتُ عَمَلًا جُزْئِيًّا فِي ______ . أَعْمَلُ يَوْمَ ______ مِنَ ______ إِلَى ______ .</a:t>
@@ -26056,6 +26204,7 @@
                   <a:srgbClr val="1B3B6F"/>
                 </a:solidFill>
                 <a:latin typeface="Amiri" pitchFamily="2" charset="-78"/>
+                <a:ea typeface="Amiri" pitchFamily="2" charset="-78"/>
                 <a:cs typeface="Amiri" pitchFamily="2" charset="-78"/>
               </a:rPr>
               <a:t>أُرَتِّبُ ______ ، وَأُسَاعِدُ ______ .</a:t>
@@ -26262,6 +26411,7 @@
                   <a:srgbClr val="1B3B6F"/>
                 </a:solidFill>
                 <a:latin typeface="Amiri" pitchFamily="2" charset="-78"/>
+                <a:ea typeface="Amiri" pitchFamily="2" charset="-78"/>
                 <a:cs typeface="Amiri" pitchFamily="2" charset="-78"/>
               </a:rPr>
               <a:t>فِي الصَّيْفِ المَاضِي كُنْتُ أَعْمَلُ فِي ______ ، وَكَانَ العَمَلُ ______ .</a:t>
@@ -26468,6 +26618,7 @@
                   <a:srgbClr val="1B3B6F"/>
                 </a:solidFill>
                 <a:latin typeface="Amiri" pitchFamily="2" charset="-78"/>
+                <a:ea typeface="Amiri" pitchFamily="2" charset="-78"/>
                 <a:cs typeface="Amiri" pitchFamily="2" charset="-78"/>
               </a:rPr>
               <a:t>فِي رَأْيِي ______ أَفْضَلُ مِنْ ______ . بِالمَالِ سَأَشْتَرِي ______ .</a:t>
@@ -26674,6 +26825,7 @@
                   <a:srgbClr val="1B3B6F"/>
                 </a:solidFill>
                 <a:latin typeface="Amiri" pitchFamily="2" charset="-78"/>
+                <a:ea typeface="Amiri" pitchFamily="2" charset="-78"/>
                 <a:cs typeface="Amiri" pitchFamily="2" charset="-78"/>
               </a:rPr>
               <a:t>إِلَى اللِّقَاءِ، ______</a:t>
@@ -26913,13 +27065,9 @@
     <a:fontScheme name="Office">
       <a:majorFont>
         <a:latin typeface="Calibri Light" panose="020F0302020204030204"/>
-        <a:ea typeface=""/>
-        <a:cs typeface=""/>
-        <a:font script="Jpan" typeface="游ゴシック Light"/>
-        <a:font script="Hang" typeface="맑은 고딕"/>
-        <a:font script="Hans" typeface="等线 Light"/>
-        <a:font script="Hant" typeface="新細明體"/>
-        <a:font script="Arab" typeface="Times New Roman"/>
+        <a:ea typeface="Amiri" pitchFamily="2" charset="-78"/>
+        <a:cs typeface="Amiri" pitchFamily="2" charset="-78"/>
+        <a:font script="Arab" typeface="Amiri"/>
         <a:font script="Hebr" typeface="Times New Roman"/>
         <a:font script="Thai" typeface="Angsana New"/>
         <a:font script="Ethi" typeface="Nyala"/>
@@ -26965,13 +27113,9 @@
       </a:majorFont>
       <a:minorFont>
         <a:latin typeface="Calibri" panose="020F0502020204030204"/>
-        <a:ea typeface=""/>
-        <a:cs typeface=""/>
-        <a:font script="Jpan" typeface="游ゴシック"/>
-        <a:font script="Hang" typeface="맑은 고딕"/>
-        <a:font script="Hans" typeface="等线"/>
-        <a:font script="Hant" typeface="新細明體"/>
-        <a:font script="Arab" typeface="Arial"/>
+        <a:ea typeface="Amiri" pitchFamily="2" charset="-78"/>
+        <a:cs typeface="Amiri" pitchFamily="2" charset="-78"/>
+        <a:font script="Arab" typeface="Amiri"/>
         <a:font script="Hebr" typeface="Arial"/>
         <a:font script="Thai" typeface="Cordia New"/>
         <a:font script="Ethi" typeface="Nyala"/>

--- a/Topic_D/Exam_Practice/TD-L07_Writing_Workshop_The_Workplace_and_Working_Conditions.pptx
+++ b/Topic_D/Exam_Practice/TD-L07_Writing_Workshop_The_Workplace_and_Working_Conditions.pptx
@@ -3848,7 +3848,7 @@
                 <a:solidFill>
                   <a:srgbClr val="FFFFFF"/>
                 </a:solidFill>
-                <a:latin typeface="Calibri" pitchFamily="34" charset="0"/>
+                <a:latin typeface="Amiri" pitchFamily="2" charset="-78"/>
                 <a:ea typeface="Amiri" pitchFamily="2" charset="-78"/>
                 <a:cs typeface="Amiri" pitchFamily="2" charset="-78"/>
               </a:rPr>
@@ -3914,7 +3914,7 @@
                 <a:solidFill>
                   <a:srgbClr val="FFFFFF"/>
                 </a:solidFill>
-                <a:latin typeface="Calibri" pitchFamily="34" charset="0"/>
+                <a:latin typeface="Amiri" pitchFamily="2" charset="-78"/>
                 <a:ea typeface="Amiri" pitchFamily="2" charset="-78"/>
                 <a:cs typeface="Amiri" pitchFamily="2" charset="-78"/>
               </a:rPr>
@@ -3980,7 +3980,7 @@
                 <a:solidFill>
                   <a:srgbClr val="FFFFFF"/>
                 </a:solidFill>
-                <a:latin typeface="Calibri" pitchFamily="34" charset="0"/>
+                <a:latin typeface="Amiri" pitchFamily="2" charset="-78"/>
                 <a:ea typeface="Amiri" pitchFamily="2" charset="-78"/>
                 <a:cs typeface="Amiri" pitchFamily="2" charset="-78"/>
               </a:rPr>
@@ -4046,7 +4046,7 @@
                 <a:solidFill>
                   <a:srgbClr val="FFFFFF"/>
                 </a:solidFill>
-                <a:latin typeface="Calibri" pitchFamily="34" charset="0"/>
+                <a:latin typeface="Amiri" pitchFamily="2" charset="-78"/>
                 <a:ea typeface="Amiri" pitchFamily="2" charset="-78"/>
                 <a:cs typeface="Amiri" pitchFamily="2" charset="-78"/>
               </a:rPr>
@@ -4844,7 +4844,7 @@
                 <a:solidFill>
                   <a:srgbClr val="FFFFFF"/>
                 </a:solidFill>
-                <a:latin typeface="Calibri" pitchFamily="34" charset="0"/>
+                <a:latin typeface="Amiri" pitchFamily="2" charset="-78"/>
                 <a:ea typeface="Amiri" pitchFamily="2" charset="-78"/>
                 <a:cs typeface="Amiri" pitchFamily="2" charset="-78"/>
               </a:rPr>
@@ -4910,7 +4910,7 @@
                 <a:solidFill>
                   <a:srgbClr val="FFFFFF"/>
                 </a:solidFill>
-                <a:latin typeface="Calibri" pitchFamily="34" charset="0"/>
+                <a:latin typeface="Amiri" pitchFamily="2" charset="-78"/>
                 <a:ea typeface="Amiri" pitchFamily="2" charset="-78"/>
                 <a:cs typeface="Amiri" pitchFamily="2" charset="-78"/>
               </a:rPr>
@@ -4976,7 +4976,7 @@
                 <a:solidFill>
                   <a:srgbClr val="FFFFFF"/>
                 </a:solidFill>
-                <a:latin typeface="Calibri" pitchFamily="34" charset="0"/>
+                <a:latin typeface="Amiri" pitchFamily="2" charset="-78"/>
                 <a:ea typeface="Amiri" pitchFamily="2" charset="-78"/>
                 <a:cs typeface="Amiri" pitchFamily="2" charset="-78"/>
               </a:rPr>
@@ -5042,7 +5042,7 @@
                 <a:solidFill>
                   <a:srgbClr val="FFFFFF"/>
                 </a:solidFill>
-                <a:latin typeface="Calibri" pitchFamily="34" charset="0"/>
+                <a:latin typeface="Amiri" pitchFamily="2" charset="-78"/>
                 <a:ea typeface="Amiri" pitchFamily="2" charset="-78"/>
                 <a:cs typeface="Amiri" pitchFamily="2" charset="-78"/>
               </a:rPr>
@@ -8599,7 +8599,7 @@
                 <a:solidFill>
                   <a:srgbClr val="FFFFFF"/>
                 </a:solidFill>
-                <a:latin typeface="Calibri" pitchFamily="34" charset="0"/>
+                <a:latin typeface="Amiri" pitchFamily="2" charset="-78"/>
                 <a:ea typeface="Amiri" pitchFamily="2" charset="-78"/>
                 <a:cs typeface="Amiri" pitchFamily="2" charset="-78"/>
               </a:rPr>
@@ -8665,7 +8665,7 @@
                 <a:solidFill>
                   <a:srgbClr val="FFFFFF"/>
                 </a:solidFill>
-                <a:latin typeface="Calibri" pitchFamily="34" charset="0"/>
+                <a:latin typeface="Amiri" pitchFamily="2" charset="-78"/>
                 <a:ea typeface="Amiri" pitchFamily="2" charset="-78"/>
                 <a:cs typeface="Amiri" pitchFamily="2" charset="-78"/>
               </a:rPr>
@@ -8731,7 +8731,7 @@
                 <a:solidFill>
                   <a:srgbClr val="FFFFFF"/>
                 </a:solidFill>
-                <a:latin typeface="Calibri" pitchFamily="34" charset="0"/>
+                <a:latin typeface="Amiri" pitchFamily="2" charset="-78"/>
                 <a:ea typeface="Amiri" pitchFamily="2" charset="-78"/>
                 <a:cs typeface="Amiri" pitchFamily="2" charset="-78"/>
               </a:rPr>
@@ -8797,7 +8797,7 @@
                 <a:solidFill>
                   <a:srgbClr val="FFFFFF"/>
                 </a:solidFill>
-                <a:latin typeface="Calibri" pitchFamily="34" charset="0"/>
+                <a:latin typeface="Amiri" pitchFamily="2" charset="-78"/>
                 <a:ea typeface="Amiri" pitchFamily="2" charset="-78"/>
                 <a:cs typeface="Amiri" pitchFamily="2" charset="-78"/>
               </a:rPr>
@@ -9584,7 +9584,7 @@
                 <a:solidFill>
                   <a:srgbClr val="FFFFFF"/>
                 </a:solidFill>
-                <a:latin typeface="Calibri" pitchFamily="34" charset="0"/>
+                <a:latin typeface="Amiri" pitchFamily="2" charset="-78"/>
                 <a:ea typeface="Amiri" pitchFamily="2" charset="-78"/>
                 <a:cs typeface="Amiri" pitchFamily="2" charset="-78"/>
               </a:rPr>
@@ -9650,7 +9650,7 @@
                 <a:solidFill>
                   <a:srgbClr val="FFFFFF"/>
                 </a:solidFill>
-                <a:latin typeface="Calibri" pitchFamily="34" charset="0"/>
+                <a:latin typeface="Amiri" pitchFamily="2" charset="-78"/>
                 <a:ea typeface="Amiri" pitchFamily="2" charset="-78"/>
                 <a:cs typeface="Amiri" pitchFamily="2" charset="-78"/>
               </a:rPr>
@@ -9716,7 +9716,7 @@
                 <a:solidFill>
                   <a:srgbClr val="FFFFFF"/>
                 </a:solidFill>
-                <a:latin typeface="Calibri" pitchFamily="34" charset="0"/>
+                <a:latin typeface="Amiri" pitchFamily="2" charset="-78"/>
                 <a:ea typeface="Amiri" pitchFamily="2" charset="-78"/>
                 <a:cs typeface="Amiri" pitchFamily="2" charset="-78"/>
               </a:rPr>
@@ -9782,7 +9782,7 @@
                 <a:solidFill>
                   <a:srgbClr val="FFFFFF"/>
                 </a:solidFill>
-                <a:latin typeface="Calibri" pitchFamily="34" charset="0"/>
+                <a:latin typeface="Amiri" pitchFamily="2" charset="-78"/>
                 <a:ea typeface="Amiri" pitchFamily="2" charset="-78"/>
                 <a:cs typeface="Amiri" pitchFamily="2" charset="-78"/>
               </a:rPr>
@@ -10569,7 +10569,7 @@
                 <a:solidFill>
                   <a:srgbClr val="FFFFFF"/>
                 </a:solidFill>
-                <a:latin typeface="Calibri" pitchFamily="34" charset="0"/>
+                <a:latin typeface="Amiri" pitchFamily="2" charset="-78"/>
                 <a:ea typeface="Amiri" pitchFamily="2" charset="-78"/>
                 <a:cs typeface="Amiri" pitchFamily="2" charset="-78"/>
               </a:rPr>
@@ -10635,7 +10635,7 @@
                 <a:solidFill>
                   <a:srgbClr val="FFFFFF"/>
                 </a:solidFill>
-                <a:latin typeface="Calibri" pitchFamily="34" charset="0"/>
+                <a:latin typeface="Amiri" pitchFamily="2" charset="-78"/>
                 <a:ea typeface="Amiri" pitchFamily="2" charset="-78"/>
                 <a:cs typeface="Amiri" pitchFamily="2" charset="-78"/>
               </a:rPr>
@@ -10701,7 +10701,7 @@
                 <a:solidFill>
                   <a:srgbClr val="FFFFFF"/>
                 </a:solidFill>
-                <a:latin typeface="Calibri" pitchFamily="34" charset="0"/>
+                <a:latin typeface="Amiri" pitchFamily="2" charset="-78"/>
                 <a:ea typeface="Amiri" pitchFamily="2" charset="-78"/>
                 <a:cs typeface="Amiri" pitchFamily="2" charset="-78"/>
               </a:rPr>
@@ -10767,7 +10767,7 @@
                 <a:solidFill>
                   <a:srgbClr val="FFFFFF"/>
                 </a:solidFill>
-                <a:latin typeface="Calibri" pitchFamily="34" charset="0"/>
+                <a:latin typeface="Amiri" pitchFamily="2" charset="-78"/>
                 <a:ea typeface="Amiri" pitchFamily="2" charset="-78"/>
                 <a:cs typeface="Amiri" pitchFamily="2" charset="-78"/>
               </a:rPr>
